--- a/apps/resources/bundled_files/3-klass-maalymat-chogultuu-sabak.pptx
+++ b/apps/resources/bundled_files/3-klass-maalymat-chogultuu-sabak.pptx
@@ -5196,7 +5196,7 @@
                 </a:solidFill>
                 <a:latin typeface="PT Sans"/>
               </a:rPr>
-              <a:t>3-класс · Математика</a:t>
+              <a:t/>
             </a:r>
           </a:p>
         </p:txBody>
@@ -5400,7 +5400,7 @@
                 </a:solidFill>
                 <a:latin typeface="PT Sans"/>
               </a:rPr>
-              <a:t>Китеп: Математика стандарты, 3-класс; Cambridge Primary 3 (маалымат чогултуу: суроо, чийиктер, жыштык таблицасы, пиктограмма). Мазмуну оригиналдуу.</a:t>
+              <a:t>Китеп: Математика стандарты, 3-класс (маалымат чогултуу: суроо, чийиктер, жыштык таблицасы, пиктограмма). Мазмуну оригиналдуу.</a:t>
             </a:r>
           </a:p>
         </p:txBody>
@@ -5688,7 +5688,7 @@
                 </a:solidFill>
                 <a:latin typeface="PT Sans"/>
               </a:rPr>
-              <a:t>3-класс ›</a:t>
+              <a:t/>
             </a:r>
           </a:p>
           <a:p>
@@ -6637,7 +6637,7 @@
                 </a:solidFill>
                 <a:latin typeface="PT Sans"/>
               </a:rPr>
-              <a:t>3-класс ›</a:t>
+              <a:t/>
             </a:r>
           </a:p>
           <a:p>
@@ -10550,7 +10550,7 @@
                 </a:solidFill>
                 <a:latin typeface="PT Sans"/>
               </a:rPr>
-              <a:t>3-класс ›</a:t>
+              <a:t/>
             </a:r>
           </a:p>
           <a:p>
@@ -14698,7 +14698,7 @@
                 </a:solidFill>
                 <a:latin typeface="PT Sans"/>
               </a:rPr>
-              <a:t>3-класс ›</a:t>
+              <a:t/>
             </a:r>
           </a:p>
           <a:p>
@@ -16281,7 +16281,7 @@
                 </a:solidFill>
                 <a:latin typeface="PT Sans"/>
               </a:rPr>
-              <a:t>3-класс ›</a:t>
+              <a:t/>
             </a:r>
           </a:p>
           <a:p>
@@ -17032,7 +17032,7 @@
                 </a:solidFill>
                 <a:latin typeface="PT Sans"/>
               </a:rPr>
-              <a:t>3-класс ›</a:t>
+              <a:t/>
             </a:r>
           </a:p>
           <a:p>
@@ -17783,7 +17783,7 @@
                 </a:solidFill>
                 <a:latin typeface="PT Sans"/>
               </a:rPr>
-              <a:t>3-класс ›</a:t>
+              <a:t/>
             </a:r>
           </a:p>
           <a:p>
@@ -19410,7 +19410,7 @@
                 </a:solidFill>
                 <a:latin typeface="PT Sans"/>
               </a:rPr>
-              <a:t>3-класс ›</a:t>
+              <a:t/>
             </a:r>
           </a:p>
           <a:p>
@@ -20494,7 +20494,7 @@
                 </a:solidFill>
                 <a:latin typeface="PT Sans"/>
               </a:rPr>
-              <a:t>3-класс ›</a:t>
+              <a:t/>
             </a:r>
           </a:p>
           <a:p>
@@ -22024,7 +22024,7 @@
                 </a:solidFill>
                 <a:latin typeface="PT Sans"/>
               </a:rPr>
-              <a:t>3-класс ›</a:t>
+              <a:t/>
             </a:r>
           </a:p>
           <a:p>
@@ -23860,7 +23860,7 @@
                 </a:solidFill>
                 <a:latin typeface="PT Sans"/>
               </a:rPr>
-              <a:t>3-класс ›</a:t>
+              <a:t/>
             </a:r>
           </a:p>
           <a:p>
@@ -25137,7 +25137,7 @@
                 </a:solidFill>
                 <a:latin typeface="PT Sans"/>
               </a:rPr>
-              <a:t>3-класс ›</a:t>
+              <a:t/>
             </a:r>
           </a:p>
           <a:p>
@@ -26565,7 +26565,7 @@
                 </a:solidFill>
                 <a:latin typeface="PT Sans"/>
               </a:rPr>
-              <a:t>3-класс ›</a:t>
+              <a:t/>
             </a:r>
           </a:p>
           <a:p>
@@ -28021,7 +28021,7 @@
                 </a:solidFill>
                 <a:latin typeface="PT Sans"/>
               </a:rPr>
-              <a:t>3-класс ›</a:t>
+              <a:t/>
             </a:r>
           </a:p>
           <a:p>
@@ -29001,7 +29001,7 @@
                 </a:solidFill>
                 <a:latin typeface="PT Sans"/>
               </a:rPr>
-              <a:t>3-класс ›</a:t>
+              <a:t/>
             </a:r>
           </a:p>
           <a:p>
@@ -29801,7 +29801,7 @@
                 </a:solidFill>
                 <a:latin typeface="PT Sans"/>
               </a:rPr>
-              <a:t>3-класс ›</a:t>
+              <a:t/>
             </a:r>
           </a:p>
           <a:p>
@@ -30642,7 +30642,7 @@
                 </a:solidFill>
                 <a:latin typeface="PT Sans"/>
               </a:rPr>
-              <a:t>3-класс ›</a:t>
+              <a:t/>
             </a:r>
           </a:p>
           <a:p>
@@ -31591,7 +31591,7 @@
                 </a:solidFill>
                 <a:latin typeface="PT Sans"/>
               </a:rPr>
-              <a:t>3-класс ›</a:t>
+              <a:t/>
             </a:r>
           </a:p>
           <a:p>
@@ -33045,7 +33045,7 @@
                 </a:solidFill>
                 <a:latin typeface="PT Sans"/>
               </a:rPr>
-              <a:t>3-класс ›</a:t>
+              <a:t/>
             </a:r>
           </a:p>
           <a:p>
@@ -33791,7 +33791,7 @@
                 </a:solidFill>
                 <a:latin typeface="PT Sans"/>
               </a:rPr>
-              <a:t>3-класс ›</a:t>
+              <a:t/>
             </a:r>
           </a:p>
           <a:p>
@@ -34599,7 +34599,7 @@
                 </a:solidFill>
                 <a:latin typeface="PT Sans"/>
               </a:rPr>
-              <a:t>3-класс ›</a:t>
+              <a:t/>
             </a:r>
           </a:p>
           <a:p>
@@ -35790,7 +35790,7 @@
                 </a:solidFill>
                 <a:latin typeface="PT Sans"/>
               </a:rPr>
-              <a:t>3-класс ›</a:t>
+              <a:t/>
             </a:r>
           </a:p>
           <a:p>
@@ -36985,7 +36985,7 @@
                 </a:solidFill>
                 <a:latin typeface="PT Sans"/>
               </a:rPr>
-              <a:t>3-класс ›</a:t>
+              <a:t/>
             </a:r>
           </a:p>
           <a:p>
@@ -37166,7 +37166,7 @@
                 </a:solidFill>
                 <a:latin typeface="PT Sans"/>
               </a:rPr>
-              <a:t>2-класс</a:t>
+              <a:t/>
             </a:r>
           </a:p>
         </p:txBody>
@@ -37346,7 +37346,7 @@
                 </a:solidFill>
                 <a:latin typeface="PT Sans"/>
               </a:rPr>
-              <a:t>3-класс</a:t>
+              <a:t/>
             </a:r>
           </a:p>
         </p:txBody>
@@ -37582,7 +37582,7 @@
                 </a:solidFill>
                 <a:latin typeface="PT Sans"/>
               </a:rPr>
-              <a:t>4-класс</a:t>
+              <a:t/>
             </a:r>
           </a:p>
         </p:txBody>
@@ -37763,7 +37763,7 @@
                 </a:solidFill>
                 <a:latin typeface="PT Sans"/>
               </a:rPr>
-              <a:t>6-класс</a:t>
+              <a:t/>
             </a:r>
           </a:p>
         </p:txBody>
@@ -38183,7 +38183,7 @@
                 </a:solidFill>
                 <a:latin typeface="PT Sans"/>
               </a:rPr>
-              <a:t>3-класс ›</a:t>
+              <a:t/>
             </a:r>
           </a:p>
           <a:p>
@@ -39331,7 +39331,7 @@
                 </a:solidFill>
                 <a:latin typeface="PT Sans"/>
               </a:rPr>
-              <a:t>3-класс ›</a:t>
+              <a:t/>
             </a:r>
           </a:p>
           <a:p>

--- a/apps/resources/bundled_files/3-klass-maalymat-chogultuu-sabak.pptx
+++ b/apps/resources/bundled_files/3-klass-maalymat-chogultuu-sabak.pptx
@@ -1582,7 +1582,7 @@
           <a:lstStyle/>
           <a:p>
             <a:r>
-              <a:t>Ой жүгүртүү маданияты (Wenxi Lee, 2.6).</a:t>
+              <a:t>Ой жүгүртүү маданияты (Wenxi Lee, 2,6).</a:t>
             </a:r>
           </a:p>
         </p:txBody>
